--- a/samples/sample.pptx
+++ b/samples/sample.pptx
@@ -84,20 +84,28 @@
       <p:sp>
         <p:nvSpPr>
           <p:cNvPr id="2" name="Title"/>
-          <p:cNvSpPr>
-            <a:spLocks noGrp="1"/>
-          </p:cNvSpPr>
-          <p:nvPr>
-            <p:ph type="title"/>
-          </p:nvPr>
+          <p:cNvSpPr txBox="1"/>
+          <p:nvPr/>
         </p:nvSpPr>
-        <p:spPr/>
+        <p:spPr>
+          <a:xfrm>
+            <a:off x="838200" y="365760"/>
+            <a:ext cx="10515600" cy="1325563"/>
+          </a:xfrm>
+          <a:prstGeom prst="rect">
+            <a:avLst/>
+          </a:prstGeom>
+        </p:spPr>
         <p:txBody>
-          <a:bodyPr/>
+          <a:bodyPr wrap="square" rtlCol="0"/>
           <a:lstStyle/>
           <a:p>
             <a:r>
-              <a:rPr lang="en-US"/>
+              <a:rPr lang="en-US" sz="4000" b="1">
+                <a:solidFill>
+                  <a:srgbClr val="1F3864"/>
+                </a:solidFill>
+              </a:rPr>
               <a:t>Sample Deck</a:t>
             </a:r>
           </a:p>
@@ -106,21 +114,49 @@
       <p:sp>
         <p:nvSpPr>
           <p:cNvPr id="3" name="Content"/>
-          <p:cNvSpPr>
-            <a:spLocks noGrp="1"/>
-          </p:cNvSpPr>
-          <p:nvPr>
-            <p:ph type="body" idx="1"/>
-          </p:nvPr>
+          <p:cNvSpPr txBox="1"/>
+          <p:nvPr/>
         </p:nvSpPr>
-        <p:spPr/>
+        <p:spPr>
+          <a:xfrm>
+            <a:off x="838200" y="1828800"/>
+            <a:ext cx="10515600" cy="4400550"/>
+          </a:xfrm>
+          <a:prstGeom prst="rect">
+            <a:avLst/>
+          </a:prstGeom>
+        </p:spPr>
         <p:txBody>
-          <a:bodyPr/>
+          <a:bodyPr wrap="square" rtlCol="0"/>
           <a:lstStyle/>
           <a:p>
             <a:r>
-              <a:rPr lang="en-US"/>
-              <a:t>Slide 1 — rendered locally with WASM + Canvas.</a:t>
+              <a:rPr lang="en-US" sz="2400" b="1">
+                <a:solidFill>
+                  <a:srgbClr val="1F3864"/>
+                </a:solidFill>
+              </a:rPr>
+              <a:t>BetterOffice engines render this deck</a:t>
+            </a:r>
+          </a:p>
+          <a:p>
+            <a:r>
+              <a:rPr lang="en-US" sz="1600"/>
+              <a:t>Canvas painting via Rust → WebAssembly, laid out with metric-compatible fonts.</a:t>
+            </a:r>
+          </a:p>
+          <a:p>
+            <a:pPr lvl="1"/>
+            <a:r>
+              <a:rPr lang="en-US" sz="1400"/>
+              <a:t>Explicit shape geometry (offset + extent in EMU)</a:t>
+            </a:r>
+          </a:p>
+          <a:p>
+            <a:pPr lvl="1"/>
+            <a:r>
+              <a:rPr lang="en-US" sz="1400"/>
+              <a:t>Theme colors, bold/italic runs, two text boxes per slide</a:t>
             </a:r>
           </a:p>
         </p:txBody>
@@ -153,21 +189,29 @@
       <p:sp>
         <p:nvSpPr>
           <p:cNvPr id="2" name="Title"/>
-          <p:cNvSpPr>
-            <a:spLocks noGrp="1"/>
-          </p:cNvSpPr>
-          <p:nvPr>
-            <p:ph type="title"/>
-          </p:nvPr>
+          <p:cNvSpPr txBox="1"/>
+          <p:nvPr/>
         </p:nvSpPr>
-        <p:spPr/>
+        <p:spPr>
+          <a:xfrm>
+            <a:off x="838200" y="365760"/>
+            <a:ext cx="10515600" cy="1325563"/>
+          </a:xfrm>
+          <a:prstGeom prst="rect">
+            <a:avLst/>
+          </a:prstGeom>
+        </p:spPr>
         <p:txBody>
-          <a:bodyPr/>
+          <a:bodyPr wrap="square" rtlCol="0"/>
           <a:lstStyle/>
           <a:p>
             <a:r>
-              <a:rPr lang="en-US"/>
-              <a:t>Second slide</a:t>
+              <a:rPr lang="en-US" sz="4000" b="1">
+                <a:solidFill>
+                  <a:srgbClr val="833C00"/>
+                </a:solidFill>
+              </a:rPr>
+              <a:t>Rendering checklist</a:t>
             </a:r>
           </a:p>
         </p:txBody>
@@ -175,21 +219,49 @@
       <p:sp>
         <p:nvSpPr>
           <p:cNvPr id="3" name="Content"/>
-          <p:cNvSpPr>
-            <a:spLocks noGrp="1"/>
-          </p:cNvSpPr>
-          <p:nvPr>
-            <p:ph type="body" idx="1"/>
-          </p:nvPr>
+          <p:cNvSpPr txBox="1"/>
+          <p:nvPr/>
         </p:nvSpPr>
-        <p:spPr/>
+        <p:spPr>
+          <a:xfrm>
+            <a:off x="838200" y="1828800"/>
+            <a:ext cx="10515600" cy="4400550"/>
+          </a:xfrm>
+          <a:prstGeom prst="rect">
+            <a:avLst/>
+          </a:prstGeom>
+        </p:spPr>
         <p:txBody>
-          <a:bodyPr/>
+          <a:bodyPr wrap="square" rtlCol="0"/>
           <a:lstStyle/>
           <a:p>
             <a:r>
-              <a:rPr lang="en-US"/>
-              <a:t>Use the toolbar or arrow keys to navigate.</a:t>
+              <a:rPr lang="en-US" sz="2000" b="1"/>
+              <a:t>What to check</a:t>
+            </a:r>
+          </a:p>
+          <a:p>
+            <a:r>
+              <a:rPr lang="en-US" sz="1600"/>
+              <a:t>Pagination-faithful line breaks and text metrics</a:t>
+            </a:r>
+          </a:p>
+          <a:p>
+            <a:r>
+              <a:rPr lang="en-US" sz="1600"/>
+              <a:t>Theme-aware fills and runs (accent colors below)</a:t>
+            </a:r>
+          </a:p>
+          <a:p>
+            <a:r>
+              <a:rPr lang="en-US" sz="1600"/>
+              <a:t>Zoom, fit-page and the thumbnail rail</a:t>
+            </a:r>
+          </a:p>
+          <a:p>
+            <a:r>
+              <a:rPr lang="en-US" sz="1600"/>
+              <a:t>Find (Ctrl+F), speaker notes, export PNG</a:t>
             </a:r>
           </a:p>
         </p:txBody>
